--- a/assets/pptx/catalog-301.pptx
+++ b/assets/pptx/catalog-301.pptx
@@ -3385,7 +3385,7 @@
                 <a:ea typeface="Ebrima"/>
                 <a:cs typeface="Ebrima"/>
               </a:rPr>
-              <a:t>በስራው ፃዲቅ ትክክለኛ እርሱ ብቻ ነው (2x)</a:t>
+              <a:t>በስራው ፃዲቅ ትክክለኛ እርሱ ብቻ ነው 2x</a:t>
             </a:r>
           </a:p>
         </p:txBody>
@@ -3470,7 +3470,7 @@
                 <a:ea typeface="Ebrima"/>
                 <a:cs typeface="Ebrima"/>
               </a:rPr>
-              <a:t>በስራህ ፃዲቅ ትክክለኛ አንተ ብቻ ነህ (2x)</a:t>
+              <a:t>በስራህ ፃዲቅ ትክክለኛ አንተ ብቻ ነህ 2x</a:t>
             </a:r>
           </a:p>
         </p:txBody>
@@ -3676,7 +3676,7 @@
                 <a:ea typeface="Ebrima"/>
                 <a:cs typeface="Ebrima"/>
               </a:rPr>
-              <a:t>በስራው ፃዲቅ ትክክለኛ እርሱ ብቻ ነው (2x)</a:t>
+              <a:t>በስራው ፃዲቅ ትክክለኛ እርሱ ብቻ ነው 2x</a:t>
             </a:r>
           </a:p>
         </p:txBody>
@@ -3761,7 +3761,7 @@
                 <a:ea typeface="Ebrima"/>
                 <a:cs typeface="Ebrima"/>
               </a:rPr>
-              <a:t>በስራህ ፃዲቅ ትክክለኛ አንተ ብቻ ነህ (2x)</a:t>
+              <a:t>በስራህ ፃዲቅ ትክክለኛ አንተ ብቻ ነህ 2x</a:t>
             </a:r>
           </a:p>
         </p:txBody>
